--- a/SecurityOps-Assistant.pptx
+++ b/SecurityOps-Assistant.pptx
@@ -13,6 +13,7 @@
     <p:sldId id="261" r:id="rId7"/>
     <p:sldId id="262" r:id="rId8"/>
     <p:sldId id="263" r:id="rId9"/>
+    <p:sldId id="278" r:id="rId29"/>
     <p:sldId id="264" r:id="rId10"/>
     <p:sldId id="265" r:id="rId11"/>
     <p:sldId id="266" r:id="rId12"/>
@@ -22,6 +23,7 @@
     <p:sldId id="270" r:id="rId16"/>
     <p:sldId id="271" r:id="rId17"/>
     <p:sldId id="272" r:id="rId18"/>
+    <p:sldId id="279" r:id="rId30"/>
     <p:sldId id="273" r:id="rId19"/>
     <p:sldId id="274" r:id="rId20"/>
     <p:sldId id="275" r:id="rId21"/>
@@ -3317,7 +3319,7 @@
                 <a:ea typeface="Calibri" pitchFamily="34" charset="-122"/>
                 <a:cs typeface="Calibri" pitchFamily="34" charset="-120"/>
               </a:rPr>
-              <a:t>SecurityOps Assistant  ·  10</a:t>
+              <a:t>SecurityOps Assistant  ·  11</a:t>
             </a:r>
             <a:endParaRPr lang="en-US" sz="900" dirty="0"/>
           </a:p>
@@ -3505,7 +3507,7 @@
                 <a:ea typeface="Calibri" pitchFamily="34" charset="-122"/>
                 <a:cs typeface="Calibri" pitchFamily="34" charset="-120"/>
               </a:rPr>
-              <a:t>SecurityOps Assistant  ·  11</a:t>
+              <a:t>SecurityOps Assistant  ·  12</a:t>
             </a:r>
             <a:endParaRPr lang="en-US" sz="900" dirty="0"/>
           </a:p>
@@ -4307,7 +4309,7 @@
                 <a:ea typeface="Calibri" pitchFamily="34" charset="-122"/>
                 <a:cs typeface="Calibri" pitchFamily="34" charset="-120"/>
               </a:rPr>
-              <a:t>SecurityOps Assistant  ·  12</a:t>
+              <a:t>SecurityOps Assistant  ·  13</a:t>
             </a:r>
             <a:endParaRPr lang="en-US" sz="900" dirty="0"/>
           </a:p>
@@ -4866,7 +4868,7 @@
                 <a:ea typeface="Calibri" pitchFamily="34" charset="-122"/>
                 <a:cs typeface="Calibri" pitchFamily="34" charset="-120"/>
               </a:rPr>
-              <a:t>88 passing tests</a:t>
+              <a:t>111 passing tests</a:t>
             </a:r>
             <a:endParaRPr lang="en-US" sz="2200" dirty="0"/>
           </a:p>
@@ -5186,7 +5188,7 @@
                 <a:ea typeface="Calibri" pitchFamily="34" charset="-122"/>
                 <a:cs typeface="Calibri" pitchFamily="34" charset="-120"/>
               </a:rPr>
-              <a:t>SecurityOps Assistant  ·  13</a:t>
+              <a:t>SecurityOps Assistant  ·  14</a:t>
             </a:r>
             <a:endParaRPr lang="en-US" sz="900" dirty="0"/>
           </a:p>
@@ -6007,7 +6009,7 @@
                 <a:ea typeface="Calibri" pitchFamily="34" charset="-122"/>
                 <a:cs typeface="Calibri" pitchFamily="34" charset="-120"/>
               </a:rPr>
-              <a:t>SecurityOps Assistant  ·  14</a:t>
+              <a:t>SecurityOps Assistant  ·  15</a:t>
             </a:r>
             <a:endParaRPr lang="en-US" sz="900" dirty="0"/>
           </a:p>
@@ -6657,7 +6659,7 @@
                 <a:ea typeface="Calibri" pitchFamily="34" charset="-122"/>
                 <a:cs typeface="Calibri" pitchFamily="34" charset="-120"/>
               </a:rPr>
-              <a:t>SecurityOps Assistant  ·  15</a:t>
+              <a:t>SecurityOps Assistant  ·  16</a:t>
             </a:r>
             <a:endParaRPr lang="en-US" sz="900" dirty="0"/>
           </a:p>
@@ -7501,7 +7503,7 @@
                 <a:ea typeface="Calibri" pitchFamily="34" charset="-122"/>
                 <a:cs typeface="Calibri" pitchFamily="34" charset="-120"/>
               </a:rPr>
-              <a:t>SecurityOps Assistant  ·  16</a:t>
+              <a:t>SecurityOps Assistant  ·  17</a:t>
             </a:r>
             <a:endParaRPr lang="en-US" sz="900" dirty="0"/>
           </a:p>
@@ -8373,7 +8375,7 @@
                 <a:ea typeface="Calibri" pitchFamily="34" charset="-122"/>
                 <a:cs typeface="Calibri" pitchFamily="34" charset="-120"/>
               </a:rPr>
-              <a:t>SecurityOps Assistant  ·  17</a:t>
+              <a:t>SecurityOps Assistant  ·  18</a:t>
             </a:r>
             <a:endParaRPr lang="en-US" sz="900" dirty="0"/>
           </a:p>
@@ -9256,7 +9258,7 @@
                 <a:ea typeface="Calibri" pitchFamily="34" charset="-122"/>
                 <a:cs typeface="Calibri" pitchFamily="34" charset="-120"/>
               </a:rPr>
-              <a:t>SecurityOps Assistant  ·  18</a:t>
+              <a:t>SecurityOps Assistant  ·  20</a:t>
             </a:r>
             <a:endParaRPr lang="en-US" sz="900" dirty="0"/>
           </a:p>
@@ -9890,7 +9892,7 @@
                 <a:ea typeface="Calibri" pitchFamily="34" charset="-122"/>
                 <a:cs typeface="Calibri" pitchFamily="34" charset="-120"/>
               </a:rPr>
-              <a:t>SecurityOps Assistant  ·  19</a:t>
+              <a:t>SecurityOps Assistant  ·  21</a:t>
             </a:r>
             <a:endParaRPr lang="en-US" sz="900" dirty="0"/>
           </a:p>
@@ -11279,7 +11281,7 @@
                 <a:ea typeface="Calibri" pitchFamily="34" charset="-122"/>
                 <a:cs typeface="Calibri" pitchFamily="34" charset="-120"/>
               </a:rPr>
-              <a:t>SecurityOps Assistant  ·  20</a:t>
+              <a:t>SecurityOps Assistant  ·  22</a:t>
             </a:r>
             <a:endParaRPr lang="en-US" sz="900" dirty="0"/>
           </a:p>
@@ -12114,7 +12116,7 @@
                 <a:ea typeface="Calibri" pitchFamily="34" charset="-122"/>
                 <a:cs typeface="Calibri" pitchFamily="34" charset="-120"/>
               </a:rPr>
-              <a:t>SecurityOps Assistant  ·  21</a:t>
+              <a:t>SecurityOps Assistant  ·  23</a:t>
             </a:r>
             <a:endParaRPr lang="en-US" sz="900" dirty="0"/>
           </a:p>
@@ -12886,7 +12888,7 @@
                 <a:ea typeface="Calibri" pitchFamily="34" charset="-122"/>
                 <a:cs typeface="Calibri" pitchFamily="34" charset="-120"/>
               </a:rPr>
-              <a:t>SecurityOps Assistant  ·  22</a:t>
+              <a:t>SecurityOps Assistant  ·  24</a:t>
             </a:r>
             <a:endParaRPr lang="en-US" sz="900" dirty="0"/>
           </a:p>
@@ -12998,7 +13000,7 @@
                 <a:ea typeface="Cambria" pitchFamily="34" charset="-122"/>
                 <a:cs typeface="Cambria" pitchFamily="34" charset="-120"/>
               </a:rPr>
-              <a:t>88</a:t>
+              <a:t>111</a:t>
             </a:r>
             <a:endParaRPr lang="en-US" sz="4400" dirty="0"/>
           </a:p>
@@ -13594,6 +13596,1694 @@
               <a:t>github.com/niyant07/SecurityOps-Assistant  ·  Authorized, lawful use only</a:t>
             </a:r>
             <a:endParaRPr lang="en-US" sz="1200" dirty="0"/>
+          </a:p>
+        </p:txBody>
+      </p:sp>
+    </p:spTree>
+  </p:cSld>
+  <p:clrMapOvr>
+    <a:masterClrMapping/>
+  </p:clrMapOvr>
+</p:sld>
+</file>
+
+<file path=ppt/slides/slide23.xml><?xml version="1.0" encoding="utf-8"?>
+<p:sld xmlns:a="http://schemas.openxmlformats.org/drawingml/2006/main" xmlns:r="http://schemas.openxmlformats.org/officeDocument/2006/relationships" xmlns:p="http://schemas.openxmlformats.org/presentationml/2006/main">
+  <p:cSld name="Slide 15">
+    <p:bg>
+      <p:bgPr>
+        <a:solidFill>
+          <a:srgbClr val="0D1117"/>
+        </a:solidFill>
+      </p:bgPr>
+    </p:bg>
+    <p:spTree>
+      <p:nvGrpSpPr>
+        <p:cNvPr id="1" name=""/>
+        <p:cNvGrpSpPr/>
+        <p:nvPr/>
+      </p:nvGrpSpPr>
+      <p:grpSpPr>
+        <a:xfrm>
+          <a:off x="0" y="0"/>
+          <a:ext cx="0" cy="0"/>
+          <a:chOff x="0" y="0"/>
+          <a:chExt cx="0" cy="0"/>
+        </a:xfrm>
+      </p:grpSpPr>
+      <p:sp>
+        <p:nvSpPr>
+          <p:cNvPr id="2" name="Text 0"/>
+          <p:cNvSpPr/>
+          <p:nvPr/>
+        </p:nvSpPr>
+        <p:spPr>
+          <a:xfrm>
+            <a:off x="0" y="6473952"/>
+            <a:ext cx="12188952" cy="274320"/>
+          </a:xfrm>
+          <a:prstGeom prst="rect">
+            <a:avLst/>
+          </a:prstGeom>
+          <a:noFill/>
+          <a:ln/>
+        </p:spPr>
+        <p:txBody>
+          <a:bodyPr wrap="square" rtlCol="0" anchor="ctr"/>
+          <a:lstStyle/>
+          <a:p>
+            <a:pPr algn="ctr" indent="0" marL="0">
+              <a:buNone/>
+            </a:pPr>
+            <a:r>
+              <a:rPr lang="en-US" sz="900" dirty="0">
+                <a:solidFill>
+                  <a:srgbClr val="8B949E"/>
+                </a:solidFill>
+                <a:latin typeface="Calibri" pitchFamily="34" charset="0"/>
+                <a:ea typeface="Calibri" pitchFamily="34" charset="-122"/>
+                <a:cs typeface="Calibri" pitchFamily="34" charset="-120"/>
+              </a:rPr>
+              <a:t>SecurityOps Assistant  ·  9</a:t>
+            </a:r>
+            <a:endParaRPr lang="en-US" sz="900" dirty="0"/>
+          </a:p>
+        </p:txBody>
+      </p:sp>
+      <p:sp>
+        <p:nvSpPr>
+          <p:cNvPr id="3" name="Text 1"/>
+          <p:cNvSpPr/>
+          <p:nvPr/>
+        </p:nvSpPr>
+        <p:spPr>
+          <a:xfrm>
+            <a:off x="548640" y="411480"/>
+            <a:ext cx="11064240" cy="640080"/>
+          </a:xfrm>
+          <a:prstGeom prst="rect">
+            <a:avLst/>
+          </a:prstGeom>
+          <a:noFill/>
+          <a:ln/>
+        </p:spPr>
+        <p:txBody>
+          <a:bodyPr wrap="square" rtlCol="0" anchor="ctr"/>
+          <a:lstStyle/>
+          <a:p>
+            <a:pPr indent="0" marL="0">
+              <a:buNone/>
+            </a:pPr>
+            <a:r>
+              <a:rPr lang="en-US" sz="3200" b="1" dirty="0">
+                <a:solidFill>
+                  <a:srgbClr val="E6EDF3"/>
+                </a:solidFill>
+                <a:latin typeface="Cambria" pitchFamily="34" charset="0"/>
+                <a:ea typeface="Cambria" pitchFamily="34" charset="-122"/>
+                <a:cs typeface="Cambria" pitchFamily="34" charset="-120"/>
+              </a:rPr>
+              <a:t>Responsible Disclosure &amp; Reporting</a:t>
+            </a:r>
+            <a:endParaRPr lang="en-US" sz="3200" dirty="0"/>
+          </a:p>
+        </p:txBody>
+      </p:sp>
+      <p:sp>
+        <p:nvSpPr>
+          <p:cNvPr id="4" name="Text 2"/>
+          <p:cNvSpPr/>
+          <p:nvPr/>
+        </p:nvSpPr>
+        <p:spPr>
+          <a:xfrm>
+            <a:off x="566928" y="1024128"/>
+            <a:ext cx="11064240" cy="365760"/>
+          </a:xfrm>
+          <a:prstGeom prst="rect">
+            <a:avLst/>
+          </a:prstGeom>
+          <a:noFill/>
+          <a:ln/>
+        </p:spPr>
+        <p:txBody>
+          <a:bodyPr wrap="square" rtlCol="0" anchor="ctr"/>
+          <a:lstStyle/>
+          <a:p>
+            <a:pPr indent="0" marL="0">
+              <a:buNone/>
+            </a:pPr>
+            <a:r>
+              <a:rPr lang="en-US" sz="1400" dirty="0">
+                <a:solidFill>
+                  <a:srgbClr val="8B949E"/>
+                </a:solidFill>
+                <a:latin typeface="Calibri" pitchFamily="34" charset="0"/>
+                <a:ea typeface="Calibri" pitchFamily="34" charset="-122"/>
+                <a:cs typeface="Calibri" pitchFamily="34" charset="-120"/>
+              </a:rPr>
+              <a:t>From verified findings to a recorded, human-approved disclosure</a:t>
+            </a:r>
+            <a:endParaRPr lang="en-US" sz="1400" dirty="0"/>
+          </a:p>
+        </p:txBody>
+      </p:sp>
+      <p:sp>
+        <p:nvSpPr>
+          <p:cNvPr id="5" name="Shape 3"/>
+          <p:cNvSpPr/>
+          <p:nvPr/>
+        </p:nvSpPr>
+        <p:spPr>
+          <a:xfrm>
+            <a:off x="548640" y="1600200"/>
+            <a:ext cx="11064240" cy="841248"/>
+          </a:xfrm>
+          <a:prstGeom prst="roundRect">
+            <a:avLst>
+              <a:gd name="adj" fmla="val 9783"/>
+            </a:avLst>
+          </a:prstGeom>
+          <a:solidFill>
+            <a:srgbClr val="161B22"/>
+          </a:solidFill>
+          <a:ln w="12700">
+            <a:solidFill>
+              <a:srgbClr val="30363D"/>
+            </a:solidFill>
+            <a:prstDash val="solid"/>
+          </a:ln>
+          <a:effectLst>
+            <a:outerShdw sx="100000" sy="100000" kx="0" ky="0" algn="bl" rotWithShape="0" blurRad="101600" dist="38100" dir="5400000">
+              <a:srgbClr val="000000">
+                <a:alpha val="35000"/>
+              </a:srgbClr>
+            </a:outerShdw>
+          </a:effectLst>
+        </p:spPr>
+      </p:sp>
+      <p:sp>
+        <p:nvSpPr>
+          <p:cNvPr id="6" name="Shape 4"/>
+          <p:cNvSpPr/>
+          <p:nvPr/>
+        </p:nvSpPr>
+        <p:spPr>
+          <a:xfrm>
+            <a:off x="749808" y="1783080"/>
+            <a:ext cx="1554480" cy="475488"/>
+          </a:xfrm>
+          <a:prstGeom prst="roundRect">
+            <a:avLst>
+              <a:gd name="adj" fmla="val 11538"/>
+            </a:avLst>
+          </a:prstGeom>
+          <a:solidFill>
+            <a:srgbClr val="1C2128"/>
+          </a:solidFill>
+          <a:ln w="12700">
+            <a:solidFill>
+              <a:srgbClr val="2F81F7"/>
+            </a:solidFill>
+            <a:prstDash val="solid"/>
+          </a:ln>
+        </p:spPr>
+      </p:sp>
+      <p:sp>
+        <p:nvSpPr>
+          <p:cNvPr id="7" name="Text 5"/>
+          <p:cNvSpPr/>
+          <p:nvPr/>
+        </p:nvSpPr>
+        <p:spPr>
+          <a:xfrm>
+            <a:off x="749808" y="1783080"/>
+            <a:ext cx="1554480" cy="475488"/>
+          </a:xfrm>
+          <a:prstGeom prst="rect">
+            <a:avLst/>
+          </a:prstGeom>
+          <a:noFill/>
+          <a:ln/>
+        </p:spPr>
+        <p:txBody>
+          <a:bodyPr wrap="square" rtlCol="0" anchor="ctr"/>
+          <a:lstStyle/>
+          <a:p>
+            <a:pPr algn="ctr" indent="0" marL="0">
+              <a:buNone/>
+            </a:pPr>
+            <a:r>
+              <a:rPr lang="en-US" sz="1300" b="1" dirty="0">
+                <a:solidFill>
+                  <a:srgbClr val="2F81F7"/>
+                </a:solidFill>
+                <a:latin typeface="Courier New" pitchFamily="34" charset="0"/>
+                <a:ea typeface="Courier New" pitchFamily="34" charset="-122"/>
+                <a:cs typeface="Courier New" pitchFamily="34" charset="-120"/>
+              </a:rPr>
+              <a:t>Curate</a:t>
+            </a:r>
+            <a:endParaRPr lang="en-US" sz="1300" dirty="0"/>
+          </a:p>
+        </p:txBody>
+      </p:sp>
+      <p:sp>
+        <p:nvSpPr>
+          <p:cNvPr id="8" name="Text 6"/>
+          <p:cNvSpPr/>
+          <p:nvPr/>
+        </p:nvSpPr>
+        <p:spPr>
+          <a:xfrm>
+            <a:off x="2514600" y="1709928"/>
+            <a:ext cx="8961120" cy="640080"/>
+          </a:xfrm>
+          <a:prstGeom prst="rect">
+            <a:avLst/>
+          </a:prstGeom>
+          <a:noFill/>
+          <a:ln/>
+        </p:spPr>
+        <p:txBody>
+          <a:bodyPr wrap="square" rtlCol="0" anchor="ctr"/>
+          <a:lstStyle/>
+          <a:p>
+            <a:pPr indent="0" marL="0">
+              <a:buNone/>
+            </a:pPr>
+            <a:r>
+              <a:rPr lang="en-US" sz="1250" dirty="0">
+                <a:solidFill>
+                  <a:srgbClr val="E6EDF3"/>
+                </a:solidFill>
+                <a:latin typeface="Calibri" pitchFamily="34" charset="0"/>
+                <a:ea typeface="Calibri" pitchFamily="34" charset="-122"/>
+                <a:cs typeface="Calibri" pitchFamily="34" charset="-120"/>
+              </a:rPr>
+              <a:t>Deduplicate findings, rank by severity and confidence, and flag items to verify</a:t>
+            </a:r>
+            <a:endParaRPr lang="en-US" sz="1250" dirty="0"/>
+          </a:p>
+        </p:txBody>
+      </p:sp>
+      <p:sp>
+        <p:nvSpPr>
+          <p:cNvPr id="9" name="Shape 7"/>
+          <p:cNvSpPr/>
+          <p:nvPr/>
+        </p:nvSpPr>
+        <p:spPr>
+          <a:xfrm>
+            <a:off x="548640" y="2542032"/>
+            <a:ext cx="11064240" cy="841248"/>
+          </a:xfrm>
+          <a:prstGeom prst="roundRect">
+            <a:avLst>
+              <a:gd name="adj" fmla="val 9783"/>
+            </a:avLst>
+          </a:prstGeom>
+          <a:solidFill>
+            <a:srgbClr val="161B22"/>
+          </a:solidFill>
+          <a:ln w="12700">
+            <a:solidFill>
+              <a:srgbClr val="30363D"/>
+            </a:solidFill>
+            <a:prstDash val="solid"/>
+          </a:ln>
+          <a:effectLst>
+            <a:outerShdw sx="100000" sy="100000" kx="0" ky="0" algn="bl" rotWithShape="0" blurRad="101600" dist="38100" dir="5400000">
+              <a:srgbClr val="000000">
+                <a:alpha val="35000"/>
+              </a:srgbClr>
+            </a:outerShdw>
+          </a:effectLst>
+        </p:spPr>
+      </p:sp>
+      <p:sp>
+        <p:nvSpPr>
+          <p:cNvPr id="10" name="Shape 8"/>
+          <p:cNvSpPr/>
+          <p:nvPr/>
+        </p:nvSpPr>
+        <p:spPr>
+          <a:xfrm>
+            <a:off x="749808" y="2724912"/>
+            <a:ext cx="1554480" cy="475488"/>
+          </a:xfrm>
+          <a:prstGeom prst="roundRect">
+            <a:avLst>
+              <a:gd name="adj" fmla="val 11538"/>
+            </a:avLst>
+          </a:prstGeom>
+          <a:solidFill>
+            <a:srgbClr val="1C2128"/>
+          </a:solidFill>
+          <a:ln w="12700">
+            <a:solidFill>
+              <a:srgbClr val="3FB950"/>
+            </a:solidFill>
+            <a:prstDash val="solid"/>
+          </a:ln>
+        </p:spPr>
+      </p:sp>
+      <p:sp>
+        <p:nvSpPr>
+          <p:cNvPr id="11" name="Text 9"/>
+          <p:cNvSpPr/>
+          <p:nvPr/>
+        </p:nvSpPr>
+        <p:spPr>
+          <a:xfrm>
+            <a:off x="749808" y="2724912"/>
+            <a:ext cx="1554480" cy="475488"/>
+          </a:xfrm>
+          <a:prstGeom prst="rect">
+            <a:avLst/>
+          </a:prstGeom>
+          <a:noFill/>
+          <a:ln/>
+        </p:spPr>
+        <p:txBody>
+          <a:bodyPr wrap="square" rtlCol="0" anchor="ctr"/>
+          <a:lstStyle/>
+          <a:p>
+            <a:pPr algn="ctr" indent="0" marL="0">
+              <a:buNone/>
+            </a:pPr>
+            <a:r>
+              <a:rPr lang="en-US" sz="1300" b="1" dirty="0">
+                <a:solidFill>
+                  <a:srgbClr val="3FB950"/>
+                </a:solidFill>
+                <a:latin typeface="Courier New" pitchFamily="34" charset="0"/>
+                <a:ea typeface="Courier New" pitchFamily="34" charset="-122"/>
+                <a:cs typeface="Courier New" pitchFamily="34" charset="-120"/>
+              </a:rPr>
+              <a:t>Report</a:t>
+            </a:r>
+            <a:endParaRPr lang="en-US" sz="1300" dirty="0"/>
+          </a:p>
+        </p:txBody>
+      </p:sp>
+      <p:sp>
+        <p:nvSpPr>
+          <p:cNvPr id="12" name="Text 10"/>
+          <p:cNvSpPr/>
+          <p:nvPr/>
+        </p:nvSpPr>
+        <p:spPr>
+          <a:xfrm>
+            <a:off x="2514600" y="2651760"/>
+            <a:ext cx="8961120" cy="640080"/>
+          </a:xfrm>
+          <a:prstGeom prst="rect">
+            <a:avLst/>
+          </a:prstGeom>
+          <a:noFill/>
+          <a:ln/>
+        </p:spPr>
+        <p:txBody>
+          <a:bodyPr wrap="square" rtlCol="0" anchor="ctr"/>
+          <a:lstStyle/>
+          <a:p>
+            <a:pPr indent="0" marL="0">
+              <a:buNone/>
+            </a:pPr>
+            <a:r>
+              <a:rPr lang="en-US" sz="1250" dirty="0">
+                <a:solidFill>
+                  <a:srgbClr val="E6EDF3"/>
+                </a:solidFill>
+                <a:latin typeface="Calibri" pitchFamily="34" charset="0"/>
+                <a:ea typeface="Calibri" pitchFamily="34" charset="-122"/>
+                <a:cs typeface="Calibri" pitchFamily="34" charset="-120"/>
+              </a:rPr>
+              <a:t>Draft an editable report — adds Business Impact and a Timeline of Assessment</a:t>
+            </a:r>
+            <a:endParaRPr lang="en-US" sz="1250" dirty="0"/>
+          </a:p>
+        </p:txBody>
+      </p:sp>
+      <p:sp>
+        <p:nvSpPr>
+          <p:cNvPr id="13" name="Shape 11"/>
+          <p:cNvSpPr/>
+          <p:nvPr/>
+        </p:nvSpPr>
+        <p:spPr>
+          <a:xfrm>
+            <a:off x="548640" y="3483864"/>
+            <a:ext cx="11064240" cy="841248"/>
+          </a:xfrm>
+          <a:prstGeom prst="roundRect">
+            <a:avLst>
+              <a:gd name="adj" fmla="val 9783"/>
+            </a:avLst>
+          </a:prstGeom>
+          <a:solidFill>
+            <a:srgbClr val="161B22"/>
+          </a:solidFill>
+          <a:ln w="12700">
+            <a:solidFill>
+              <a:srgbClr val="30363D"/>
+            </a:solidFill>
+            <a:prstDash val="solid"/>
+          </a:ln>
+          <a:effectLst>
+            <a:outerShdw sx="100000" sy="100000" kx="0" ky="0" algn="bl" rotWithShape="0" blurRad="101600" dist="38100" dir="5400000">
+              <a:srgbClr val="000000">
+                <a:alpha val="35000"/>
+              </a:srgbClr>
+            </a:outerShdw>
+          </a:effectLst>
+        </p:spPr>
+      </p:sp>
+      <p:sp>
+        <p:nvSpPr>
+          <p:cNvPr id="14" name="Shape 12"/>
+          <p:cNvSpPr/>
+          <p:nvPr/>
+        </p:nvSpPr>
+        <p:spPr>
+          <a:xfrm>
+            <a:off x="749808" y="3666744"/>
+            <a:ext cx="1554480" cy="475488"/>
+          </a:xfrm>
+          <a:prstGeom prst="roundRect">
+            <a:avLst>
+              <a:gd name="adj" fmla="val 11538"/>
+            </a:avLst>
+          </a:prstGeom>
+          <a:solidFill>
+            <a:srgbClr val="1C2128"/>
+          </a:solidFill>
+          <a:ln w="12700">
+            <a:solidFill>
+              <a:srgbClr val="D29922"/>
+            </a:solidFill>
+            <a:prstDash val="solid"/>
+          </a:ln>
+        </p:spPr>
+      </p:sp>
+      <p:sp>
+        <p:nvSpPr>
+          <p:cNvPr id="15" name="Text 13"/>
+          <p:cNvSpPr/>
+          <p:nvPr/>
+        </p:nvSpPr>
+        <p:spPr>
+          <a:xfrm>
+            <a:off x="749808" y="3666744"/>
+            <a:ext cx="1554480" cy="475488"/>
+          </a:xfrm>
+          <a:prstGeom prst="rect">
+            <a:avLst/>
+          </a:prstGeom>
+          <a:noFill/>
+          <a:ln/>
+        </p:spPr>
+        <p:txBody>
+          <a:bodyPr wrap="square" rtlCol="0" anchor="ctr"/>
+          <a:lstStyle/>
+          <a:p>
+            <a:pPr algn="ctr" indent="0" marL="0">
+              <a:buNone/>
+            </a:pPr>
+            <a:r>
+              <a:rPr lang="en-US" sz="1300" b="1" dirty="0">
+                <a:solidFill>
+                  <a:srgbClr val="D29922"/>
+                </a:solidFill>
+                <a:latin typeface="Courier New" pitchFamily="34" charset="0"/>
+                <a:ea typeface="Courier New" pitchFamily="34" charset="-122"/>
+                <a:cs typeface="Courier New" pitchFamily="34" charset="-120"/>
+              </a:rPr>
+              <a:t>Contact</a:t>
+            </a:r>
+            <a:endParaRPr lang="en-US" sz="1300" dirty="0"/>
+          </a:p>
+        </p:txBody>
+      </p:sp>
+      <p:sp>
+        <p:nvSpPr>
+          <p:cNvPr id="16" name="Text 14"/>
+          <p:cNvSpPr/>
+          <p:nvPr/>
+        </p:nvSpPr>
+        <p:spPr>
+          <a:xfrm>
+            <a:off x="2514600" y="3593592"/>
+            <a:ext cx="8961120" cy="640080"/>
+          </a:xfrm>
+          <a:prstGeom prst="rect">
+            <a:avLst/>
+          </a:prstGeom>
+          <a:noFill/>
+          <a:ln/>
+        </p:spPr>
+        <p:txBody>
+          <a:bodyPr wrap="square" rtlCol="0" anchor="ctr"/>
+          <a:lstStyle/>
+          <a:p>
+            <a:pPr indent="0" marL="0">
+              <a:buNone/>
+            </a:pPr>
+            <a:r>
+              <a:rPr lang="en-US" sz="1250" dirty="0">
+                <a:solidFill>
+                  <a:srgbClr val="E6EDF3"/>
+                </a:solidFill>
+                <a:latin typeface="Calibri" pitchFamily="34" charset="0"/>
+                <a:ea typeface="Calibri" pitchFamily="34" charset="-122"/>
+                <a:cs typeface="Calibri" pitchFamily="34" charset="-120"/>
+              </a:rPr>
+              <a:t>Detect the target's RFC 9116 security.txt and auto-fill the recipient</a:t>
+            </a:r>
+            <a:endParaRPr lang="en-US" sz="1250" dirty="0"/>
+          </a:p>
+        </p:txBody>
+      </p:sp>
+      <p:sp>
+        <p:nvSpPr>
+          <p:cNvPr id="17" name="Shape 15"/>
+          <p:cNvSpPr/>
+          <p:nvPr/>
+        </p:nvSpPr>
+        <p:spPr>
+          <a:xfrm>
+            <a:off x="548640" y="4425696"/>
+            <a:ext cx="11064240" cy="841248"/>
+          </a:xfrm>
+          <a:prstGeom prst="roundRect">
+            <a:avLst>
+              <a:gd name="adj" fmla="val 9783"/>
+            </a:avLst>
+          </a:prstGeom>
+          <a:solidFill>
+            <a:srgbClr val="161B22"/>
+          </a:solidFill>
+          <a:ln w="12700">
+            <a:solidFill>
+              <a:srgbClr val="30363D"/>
+            </a:solidFill>
+            <a:prstDash val="solid"/>
+          </a:ln>
+          <a:effectLst>
+            <a:outerShdw sx="100000" sy="100000" kx="0" ky="0" algn="bl" rotWithShape="0" blurRad="101600" dist="38100" dir="5400000">
+              <a:srgbClr val="000000">
+                <a:alpha val="35000"/>
+              </a:srgbClr>
+            </a:outerShdw>
+          </a:effectLst>
+        </p:spPr>
+      </p:sp>
+      <p:sp>
+        <p:nvSpPr>
+          <p:cNvPr id="18" name="Shape 16"/>
+          <p:cNvSpPr/>
+          <p:nvPr/>
+        </p:nvSpPr>
+        <p:spPr>
+          <a:xfrm>
+            <a:off x="749808" y="4608576"/>
+            <a:ext cx="1554480" cy="475488"/>
+          </a:xfrm>
+          <a:prstGeom prst="roundRect">
+            <a:avLst>
+              <a:gd name="adj" fmla="val 11538"/>
+            </a:avLst>
+          </a:prstGeom>
+          <a:solidFill>
+            <a:srgbClr val="1C2128"/>
+          </a:solidFill>
+          <a:ln w="12700">
+            <a:solidFill>
+              <a:srgbClr val="A371F7"/>
+            </a:solidFill>
+            <a:prstDash val="solid"/>
+          </a:ln>
+        </p:spPr>
+      </p:sp>
+      <p:sp>
+        <p:nvSpPr>
+          <p:cNvPr id="19" name="Text 17"/>
+          <p:cNvSpPr/>
+          <p:nvPr/>
+        </p:nvSpPr>
+        <p:spPr>
+          <a:xfrm>
+            <a:off x="749808" y="4608576"/>
+            <a:ext cx="1554480" cy="475488"/>
+          </a:xfrm>
+          <a:prstGeom prst="rect">
+            <a:avLst/>
+          </a:prstGeom>
+          <a:noFill/>
+          <a:ln/>
+        </p:spPr>
+        <p:txBody>
+          <a:bodyPr wrap="square" rtlCol="0" anchor="ctr"/>
+          <a:lstStyle/>
+          <a:p>
+            <a:pPr algn="ctr" indent="0" marL="0">
+              <a:buNone/>
+            </a:pPr>
+            <a:r>
+              <a:rPr lang="en-US" sz="1300" b="1" dirty="0">
+                <a:solidFill>
+                  <a:srgbClr val="A371F7"/>
+                </a:solidFill>
+                <a:latin typeface="Courier New" pitchFamily="34" charset="0"/>
+                <a:ea typeface="Courier New" pitchFamily="34" charset="-122"/>
+                <a:cs typeface="Courier New" pitchFamily="34" charset="-120"/>
+              </a:rPr>
+              <a:t>Email</a:t>
+            </a:r>
+            <a:endParaRPr lang="en-US" sz="1300" dirty="0"/>
+          </a:p>
+        </p:txBody>
+      </p:sp>
+      <p:sp>
+        <p:nvSpPr>
+          <p:cNvPr id="20" name="Text 18"/>
+          <p:cNvSpPr/>
+          <p:nvPr/>
+        </p:nvSpPr>
+        <p:spPr>
+          <a:xfrm>
+            <a:off x="2514600" y="4535424"/>
+            <a:ext cx="8961120" cy="640080"/>
+          </a:xfrm>
+          <a:prstGeom prst="rect">
+            <a:avLst/>
+          </a:prstGeom>
+          <a:noFill/>
+          <a:ln/>
+        </p:spPr>
+        <p:txBody>
+          <a:bodyPr wrap="square" rtlCol="0" anchor="ctr"/>
+          <a:lstStyle/>
+          <a:p>
+            <a:pPr indent="0" marL="0">
+              <a:buNone/>
+            </a:pPr>
+            <a:r>
+              <a:rPr lang="en-US" sz="1250" dirty="0">
+                <a:solidFill>
+                  <a:srgbClr val="E6EDF3"/>
+                </a:solidFill>
+                <a:latin typeface="Calibri" pitchFamily="34" charset="0"/>
+                <a:ea typeface="Calibri" pitchFamily="34" charset="-122"/>
+                <a:cs typeface="Calibri" pitchFamily="34" charset="-120"/>
+              </a:rPr>
+              <a:t>Generate a professional, vendor-friendly disclosure email (LLM-refined if available)</a:t>
+            </a:r>
+            <a:endParaRPr lang="en-US" sz="1250" dirty="0"/>
+          </a:p>
+        </p:txBody>
+      </p:sp>
+      <p:sp>
+        <p:nvSpPr>
+          <p:cNvPr id="21" name="Shape 19"/>
+          <p:cNvSpPr/>
+          <p:nvPr/>
+        </p:nvSpPr>
+        <p:spPr>
+          <a:xfrm>
+            <a:off x="548640" y="5367528"/>
+            <a:ext cx="11064240" cy="841248"/>
+          </a:xfrm>
+          <a:prstGeom prst="roundRect">
+            <a:avLst>
+              <a:gd name="adj" fmla="val 9783"/>
+            </a:avLst>
+          </a:prstGeom>
+          <a:solidFill>
+            <a:srgbClr val="161B22"/>
+          </a:solidFill>
+          <a:ln w="12700">
+            <a:solidFill>
+              <a:srgbClr val="30363D"/>
+            </a:solidFill>
+            <a:prstDash val="solid"/>
+          </a:ln>
+          <a:effectLst>
+            <a:outerShdw sx="100000" sy="100000" kx="0" ky="0" algn="bl" rotWithShape="0" blurRad="101600" dist="38100" dir="5400000">
+              <a:srgbClr val="000000">
+                <a:alpha val="35000"/>
+              </a:srgbClr>
+            </a:outerShdw>
+          </a:effectLst>
+        </p:spPr>
+      </p:sp>
+      <p:sp>
+        <p:nvSpPr>
+          <p:cNvPr id="22" name="Shape 20"/>
+          <p:cNvSpPr/>
+          <p:nvPr/>
+        </p:nvSpPr>
+        <p:spPr>
+          <a:xfrm>
+            <a:off x="749808" y="5550408"/>
+            <a:ext cx="1554480" cy="475488"/>
+          </a:xfrm>
+          <a:prstGeom prst="roundRect">
+            <a:avLst>
+              <a:gd name="adj" fmla="val 11538"/>
+            </a:avLst>
+          </a:prstGeom>
+          <a:solidFill>
+            <a:srgbClr val="1C2128"/>
+          </a:solidFill>
+          <a:ln w="12700">
+            <a:solidFill>
+              <a:srgbClr val="F85149"/>
+            </a:solidFill>
+            <a:prstDash val="solid"/>
+          </a:ln>
+        </p:spPr>
+      </p:sp>
+      <p:sp>
+        <p:nvSpPr>
+          <p:cNvPr id="23" name="Text 21"/>
+          <p:cNvSpPr/>
+          <p:nvPr/>
+        </p:nvSpPr>
+        <p:spPr>
+          <a:xfrm>
+            <a:off x="749808" y="5550408"/>
+            <a:ext cx="1554480" cy="475488"/>
+          </a:xfrm>
+          <a:prstGeom prst="rect">
+            <a:avLst/>
+          </a:prstGeom>
+          <a:noFill/>
+          <a:ln/>
+        </p:spPr>
+        <p:txBody>
+          <a:bodyPr wrap="square" rtlCol="0" anchor="ctr"/>
+          <a:lstStyle/>
+          <a:p>
+            <a:pPr algn="ctr" indent="0" marL="0">
+              <a:buNone/>
+            </a:pPr>
+            <a:r>
+              <a:rPr lang="en-US" sz="1300" b="1" dirty="0">
+                <a:solidFill>
+                  <a:srgbClr val="F85149"/>
+                </a:solidFill>
+                <a:latin typeface="Courier New" pitchFamily="34" charset="0"/>
+                <a:ea typeface="Courier New" pitchFamily="34" charset="-122"/>
+                <a:cs typeface="Courier New" pitchFamily="34" charset="-120"/>
+              </a:rPr>
+              <a:t>Record</a:t>
+            </a:r>
+            <a:endParaRPr lang="en-US" sz="1300" dirty="0"/>
+          </a:p>
+        </p:txBody>
+      </p:sp>
+      <p:sp>
+        <p:nvSpPr>
+          <p:cNvPr id="24" name="Text 22"/>
+          <p:cNvSpPr/>
+          <p:nvPr/>
+        </p:nvSpPr>
+        <p:spPr>
+          <a:xfrm>
+            <a:off x="2514600" y="5477256"/>
+            <a:ext cx="8961120" cy="640080"/>
+          </a:xfrm>
+          <a:prstGeom prst="rect">
+            <a:avLst/>
+          </a:prstGeom>
+          <a:noFill/>
+          <a:ln/>
+        </p:spPr>
+        <p:txBody>
+          <a:bodyPr wrap="square" rtlCol="0" anchor="ctr"/>
+          <a:lstStyle/>
+          <a:p>
+            <a:pPr indent="0" marL="0">
+              <a:buNone/>
+            </a:pPr>
+            <a:r>
+              <a:rPr lang="en-US" sz="1250" dirty="0">
+                <a:solidFill>
+                  <a:srgbClr val="E6EDF3"/>
+                </a:solidFill>
+                <a:latin typeface="Calibri" pitchFamily="34" charset="0"/>
+                <a:ea typeface="Calibri" pitchFamily="34" charset="-122"/>
+                <a:cs typeface="Calibri" pitchFamily="34" charset="-120"/>
+              </a:rPr>
+              <a:t>Approve to prepare: save report + .eml, open mail client; never auto-sends</a:t>
+            </a:r>
+            <a:endParaRPr lang="en-US" sz="1250" dirty="0"/>
+          </a:p>
+        </p:txBody>
+      </p:sp>
+    </p:spTree>
+  </p:cSld>
+  <p:clrMapOvr>
+    <a:masterClrMapping/>
+  </p:clrMapOvr>
+</p:sld>
+</file>
+
+<file path=ppt/slides/slide24.xml><?xml version="1.0" encoding="utf-8"?>
+<p:sld xmlns:a="http://schemas.openxmlformats.org/drawingml/2006/main" xmlns:r="http://schemas.openxmlformats.org/officeDocument/2006/relationships" xmlns:p="http://schemas.openxmlformats.org/presentationml/2006/main">
+  <p:cSld name="Slide 15">
+    <p:bg>
+      <p:bgPr>
+        <a:solidFill>
+          <a:srgbClr val="0D1117"/>
+        </a:solidFill>
+      </p:bgPr>
+    </p:bg>
+    <p:spTree>
+      <p:nvGrpSpPr>
+        <p:cNvPr id="1" name=""/>
+        <p:cNvGrpSpPr/>
+        <p:nvPr/>
+      </p:nvGrpSpPr>
+      <p:grpSpPr>
+        <a:xfrm>
+          <a:off x="0" y="0"/>
+          <a:ext cx="0" cy="0"/>
+          <a:chOff x="0" y="0"/>
+          <a:chExt cx="0" cy="0"/>
+        </a:xfrm>
+      </p:grpSpPr>
+      <p:sp>
+        <p:nvSpPr>
+          <p:cNvPr id="2" name="Text 0"/>
+          <p:cNvSpPr/>
+          <p:nvPr/>
+        </p:nvSpPr>
+        <p:spPr>
+          <a:xfrm>
+            <a:off x="0" y="6473952"/>
+            <a:ext cx="12188952" cy="274320"/>
+          </a:xfrm>
+          <a:prstGeom prst="rect">
+            <a:avLst/>
+          </a:prstGeom>
+          <a:noFill/>
+          <a:ln/>
+        </p:spPr>
+        <p:txBody>
+          <a:bodyPr wrap="square" rtlCol="0" anchor="ctr"/>
+          <a:lstStyle/>
+          <a:p>
+            <a:pPr algn="ctr" indent="0" marL="0">
+              <a:buNone/>
+            </a:pPr>
+            <a:r>
+              <a:rPr lang="en-US" sz="900" dirty="0">
+                <a:solidFill>
+                  <a:srgbClr val="8B949E"/>
+                </a:solidFill>
+                <a:latin typeface="Calibri" pitchFamily="34" charset="0"/>
+                <a:ea typeface="Calibri" pitchFamily="34" charset="-122"/>
+                <a:cs typeface="Calibri" pitchFamily="34" charset="-120"/>
+              </a:rPr>
+              <a:t>SecurityOps Assistant  ·  19</a:t>
+            </a:r>
+            <a:endParaRPr lang="en-US" sz="900" dirty="0"/>
+          </a:p>
+        </p:txBody>
+      </p:sp>
+      <p:sp>
+        <p:nvSpPr>
+          <p:cNvPr id="3" name="Text 1"/>
+          <p:cNvSpPr/>
+          <p:nvPr/>
+        </p:nvSpPr>
+        <p:spPr>
+          <a:xfrm>
+            <a:off x="548640" y="411480"/>
+            <a:ext cx="11064240" cy="640080"/>
+          </a:xfrm>
+          <a:prstGeom prst="rect">
+            <a:avLst/>
+          </a:prstGeom>
+          <a:noFill/>
+          <a:ln/>
+        </p:spPr>
+        <p:txBody>
+          <a:bodyPr wrap="square" rtlCol="0" anchor="ctr"/>
+          <a:lstStyle/>
+          <a:p>
+            <a:pPr indent="0" marL="0">
+              <a:buNone/>
+            </a:pPr>
+            <a:r>
+              <a:rPr lang="en-US" sz="3200" b="1" dirty="0">
+                <a:solidFill>
+                  <a:srgbClr val="E6EDF3"/>
+                </a:solidFill>
+                <a:latin typeface="Cambria" pitchFamily="34" charset="0"/>
+                <a:ea typeface="Cambria" pitchFamily="34" charset="-122"/>
+                <a:cs typeface="Cambria" pitchFamily="34" charset="-120"/>
+              </a:rPr>
+              <a:t>Inside the Disclosure module</a:t>
+            </a:r>
+            <a:endParaRPr lang="en-US" sz="3200" dirty="0"/>
+          </a:p>
+        </p:txBody>
+      </p:sp>
+      <p:sp>
+        <p:nvSpPr>
+          <p:cNvPr id="4" name="Text 2"/>
+          <p:cNvSpPr/>
+          <p:nvPr/>
+        </p:nvSpPr>
+        <p:spPr>
+          <a:xfrm>
+            <a:off x="566928" y="1024128"/>
+            <a:ext cx="11064240" cy="365760"/>
+          </a:xfrm>
+          <a:prstGeom prst="rect">
+            <a:avLst/>
+          </a:prstGeom>
+          <a:noFill/>
+          <a:ln/>
+        </p:spPr>
+        <p:txBody>
+          <a:bodyPr wrap="square" rtlCol="0" anchor="ctr"/>
+          <a:lstStyle/>
+          <a:p>
+            <a:pPr indent="0" marL="0">
+              <a:buNone/>
+            </a:pPr>
+            <a:r>
+              <a:rPr lang="en-US" sz="1400" dirty="0">
+                <a:solidFill>
+                  <a:srgbClr val="8B949E"/>
+                </a:solidFill>
+                <a:latin typeface="Calibri" pitchFamily="34" charset="0"/>
+                <a:ea typeface="Calibri" pitchFamily="34" charset="-122"/>
+                <a:cs typeface="Calibri" pitchFamily="34" charset="-120"/>
+              </a:rPr>
+              <a:t>Reuses the shared DB, AI &amp; reporting — adds curation, security.txt &amp; email</a:t>
+            </a:r>
+            <a:endParaRPr lang="en-US" sz="1400" dirty="0"/>
+          </a:p>
+        </p:txBody>
+      </p:sp>
+      <p:sp>
+        <p:nvSpPr>
+          <p:cNvPr id="5" name="Shape 3"/>
+          <p:cNvSpPr/>
+          <p:nvPr/>
+        </p:nvSpPr>
+        <p:spPr>
+          <a:xfrm>
+            <a:off x="548640" y="1600200"/>
+            <a:ext cx="11064240" cy="841248"/>
+          </a:xfrm>
+          <a:prstGeom prst="roundRect">
+            <a:avLst>
+              <a:gd name="adj" fmla="val 9783"/>
+            </a:avLst>
+          </a:prstGeom>
+          <a:solidFill>
+            <a:srgbClr val="161B22"/>
+          </a:solidFill>
+          <a:ln w="12700">
+            <a:solidFill>
+              <a:srgbClr val="30363D"/>
+            </a:solidFill>
+            <a:prstDash val="solid"/>
+          </a:ln>
+          <a:effectLst>
+            <a:outerShdw sx="100000" sy="100000" kx="0" ky="0" algn="bl" rotWithShape="0" blurRad="101600" dist="38100" dir="5400000">
+              <a:srgbClr val="000000">
+                <a:alpha val="35000"/>
+              </a:srgbClr>
+            </a:outerShdw>
+          </a:effectLst>
+        </p:spPr>
+      </p:sp>
+      <p:sp>
+        <p:nvSpPr>
+          <p:cNvPr id="6" name="Shape 4"/>
+          <p:cNvSpPr/>
+          <p:nvPr/>
+        </p:nvSpPr>
+        <p:spPr>
+          <a:xfrm>
+            <a:off x="749808" y="1783080"/>
+            <a:ext cx="1554480" cy="475488"/>
+          </a:xfrm>
+          <a:prstGeom prst="roundRect">
+            <a:avLst>
+              <a:gd name="adj" fmla="val 11538"/>
+            </a:avLst>
+          </a:prstGeom>
+          <a:solidFill>
+            <a:srgbClr val="1C2128"/>
+          </a:solidFill>
+          <a:ln w="12700">
+            <a:solidFill>
+              <a:srgbClr val="2F81F7"/>
+            </a:solidFill>
+            <a:prstDash val="solid"/>
+          </a:ln>
+        </p:spPr>
+      </p:sp>
+      <p:sp>
+        <p:nvSpPr>
+          <p:cNvPr id="7" name="Text 5"/>
+          <p:cNvSpPr/>
+          <p:nvPr/>
+        </p:nvSpPr>
+        <p:spPr>
+          <a:xfrm>
+            <a:off x="749808" y="1783080"/>
+            <a:ext cx="1554480" cy="475488"/>
+          </a:xfrm>
+          <a:prstGeom prst="rect">
+            <a:avLst/>
+          </a:prstGeom>
+          <a:noFill/>
+          <a:ln/>
+        </p:spPr>
+        <p:txBody>
+          <a:bodyPr wrap="square" rtlCol="0" anchor="ctr"/>
+          <a:lstStyle/>
+          <a:p>
+            <a:pPr algn="ctr" indent="0" marL="0">
+              <a:buNone/>
+            </a:pPr>
+            <a:r>
+              <a:rPr lang="en-US" sz="1300" b="1" dirty="0">
+                <a:solidFill>
+                  <a:srgbClr val="2F81F7"/>
+                </a:solidFill>
+                <a:latin typeface="Courier New" pitchFamily="34" charset="0"/>
+                <a:ea typeface="Courier New" pitchFamily="34" charset="-122"/>
+                <a:cs typeface="Courier New" pitchFamily="34" charset="-120"/>
+              </a:rPr>
+              <a:t>security_txt</a:t>
+            </a:r>
+            <a:endParaRPr lang="en-US" sz="1300" dirty="0"/>
+          </a:p>
+        </p:txBody>
+      </p:sp>
+      <p:sp>
+        <p:nvSpPr>
+          <p:cNvPr id="8" name="Text 6"/>
+          <p:cNvSpPr/>
+          <p:nvPr/>
+        </p:nvSpPr>
+        <p:spPr>
+          <a:xfrm>
+            <a:off x="2514600" y="1709928"/>
+            <a:ext cx="8961120" cy="640080"/>
+          </a:xfrm>
+          <a:prstGeom prst="rect">
+            <a:avLst/>
+          </a:prstGeom>
+          <a:noFill/>
+          <a:ln/>
+        </p:spPr>
+        <p:txBody>
+          <a:bodyPr wrap="square" rtlCol="0" anchor="ctr"/>
+          <a:lstStyle/>
+          <a:p>
+            <a:pPr indent="0" marL="0">
+              <a:buNone/>
+            </a:pPr>
+            <a:r>
+              <a:rPr lang="en-US" sz="1250" dirty="0">
+                <a:solidFill>
+                  <a:srgbClr val="E6EDF3"/>
+                </a:solidFill>
+                <a:latin typeface="Calibri" pitchFamily="34" charset="0"/>
+                <a:ea typeface="Calibri" pitchFamily="34" charset="-122"/>
+                <a:cs typeface="Calibri" pitchFamily="34" charset="-120"/>
+              </a:rPr>
+              <a:t>RFC 9116 parse + optional user-triggered fetch of the security contact</a:t>
+            </a:r>
+            <a:endParaRPr lang="en-US" sz="1250" dirty="0"/>
+          </a:p>
+        </p:txBody>
+      </p:sp>
+      <p:sp>
+        <p:nvSpPr>
+          <p:cNvPr id="9" name="Shape 7"/>
+          <p:cNvSpPr/>
+          <p:nvPr/>
+        </p:nvSpPr>
+        <p:spPr>
+          <a:xfrm>
+            <a:off x="548640" y="2542032"/>
+            <a:ext cx="11064240" cy="841248"/>
+          </a:xfrm>
+          <a:prstGeom prst="roundRect">
+            <a:avLst>
+              <a:gd name="adj" fmla="val 9783"/>
+            </a:avLst>
+          </a:prstGeom>
+          <a:solidFill>
+            <a:srgbClr val="161B22"/>
+          </a:solidFill>
+          <a:ln w="12700">
+            <a:solidFill>
+              <a:srgbClr val="30363D"/>
+            </a:solidFill>
+            <a:prstDash val="solid"/>
+          </a:ln>
+          <a:effectLst>
+            <a:outerShdw sx="100000" sy="100000" kx="0" ky="0" algn="bl" rotWithShape="0" blurRad="101600" dist="38100" dir="5400000">
+              <a:srgbClr val="000000">
+                <a:alpha val="35000"/>
+              </a:srgbClr>
+            </a:outerShdw>
+          </a:effectLst>
+        </p:spPr>
+      </p:sp>
+      <p:sp>
+        <p:nvSpPr>
+          <p:cNvPr id="10" name="Shape 8"/>
+          <p:cNvSpPr/>
+          <p:nvPr/>
+        </p:nvSpPr>
+        <p:spPr>
+          <a:xfrm>
+            <a:off x="749808" y="2724912"/>
+            <a:ext cx="1554480" cy="475488"/>
+          </a:xfrm>
+          <a:prstGeom prst="roundRect">
+            <a:avLst>
+              <a:gd name="adj" fmla="val 11538"/>
+            </a:avLst>
+          </a:prstGeom>
+          <a:solidFill>
+            <a:srgbClr val="1C2128"/>
+          </a:solidFill>
+          <a:ln w="12700">
+            <a:solidFill>
+              <a:srgbClr val="3FB950"/>
+            </a:solidFill>
+            <a:prstDash val="solid"/>
+          </a:ln>
+        </p:spPr>
+      </p:sp>
+      <p:sp>
+        <p:nvSpPr>
+          <p:cNvPr id="11" name="Text 9"/>
+          <p:cNvSpPr/>
+          <p:nvPr/>
+        </p:nvSpPr>
+        <p:spPr>
+          <a:xfrm>
+            <a:off x="749808" y="2724912"/>
+            <a:ext cx="1554480" cy="475488"/>
+          </a:xfrm>
+          <a:prstGeom prst="rect">
+            <a:avLst/>
+          </a:prstGeom>
+          <a:noFill/>
+          <a:ln/>
+        </p:spPr>
+        <p:txBody>
+          <a:bodyPr wrap="square" rtlCol="0" anchor="ctr"/>
+          <a:lstStyle/>
+          <a:p>
+            <a:pPr algn="ctr" indent="0" marL="0">
+              <a:buNone/>
+            </a:pPr>
+            <a:r>
+              <a:rPr lang="en-US" sz="1300" b="1" dirty="0">
+                <a:solidFill>
+                  <a:srgbClr val="3FB950"/>
+                </a:solidFill>
+                <a:latin typeface="Courier New" pitchFamily="34" charset="0"/>
+                <a:ea typeface="Courier New" pitchFamily="34" charset="-122"/>
+                <a:cs typeface="Courier New" pitchFamily="34" charset="-120"/>
+              </a:rPr>
+              <a:t>curate.py</a:t>
+            </a:r>
+            <a:endParaRPr lang="en-US" sz="1300" dirty="0"/>
+          </a:p>
+        </p:txBody>
+      </p:sp>
+      <p:sp>
+        <p:nvSpPr>
+          <p:cNvPr id="12" name="Text 10"/>
+          <p:cNvSpPr/>
+          <p:nvPr/>
+        </p:nvSpPr>
+        <p:spPr>
+          <a:xfrm>
+            <a:off x="2514600" y="2651760"/>
+            <a:ext cx="8961120" cy="640080"/>
+          </a:xfrm>
+          <a:prstGeom prst="rect">
+            <a:avLst/>
+          </a:prstGeom>
+          <a:noFill/>
+          <a:ln/>
+        </p:spPr>
+        <p:txBody>
+          <a:bodyPr wrap="square" rtlCol="0" anchor="ctr"/>
+          <a:lstStyle/>
+          <a:p>
+            <a:pPr indent="0" marL="0">
+              <a:buNone/>
+            </a:pPr>
+            <a:r>
+              <a:rPr lang="en-US" sz="1250" dirty="0">
+                <a:solidFill>
+                  <a:srgbClr val="E6EDF3"/>
+                </a:solidFill>
+                <a:latin typeface="Calibri" pitchFamily="34" charset="0"/>
+                <a:ea typeface="Calibri" pitchFamily="34" charset="-122"/>
+                <a:cs typeface="Calibri" pitchFamily="34" charset="-120"/>
+              </a:rPr>
+              <a:t>Deduplicate, rank by severity + confidence, and flag Tentative findings</a:t>
+            </a:r>
+            <a:endParaRPr lang="en-US" sz="1250" dirty="0"/>
+          </a:p>
+        </p:txBody>
+      </p:sp>
+      <p:sp>
+        <p:nvSpPr>
+          <p:cNvPr id="13" name="Shape 11"/>
+          <p:cNvSpPr/>
+          <p:nvPr/>
+        </p:nvSpPr>
+        <p:spPr>
+          <a:xfrm>
+            <a:off x="548640" y="3483864"/>
+            <a:ext cx="11064240" cy="841248"/>
+          </a:xfrm>
+          <a:prstGeom prst="roundRect">
+            <a:avLst>
+              <a:gd name="adj" fmla="val 9783"/>
+            </a:avLst>
+          </a:prstGeom>
+          <a:solidFill>
+            <a:srgbClr val="161B22"/>
+          </a:solidFill>
+          <a:ln w="12700">
+            <a:solidFill>
+              <a:srgbClr val="30363D"/>
+            </a:solidFill>
+            <a:prstDash val="solid"/>
+          </a:ln>
+          <a:effectLst>
+            <a:outerShdw sx="100000" sy="100000" kx="0" ky="0" algn="bl" rotWithShape="0" blurRad="101600" dist="38100" dir="5400000">
+              <a:srgbClr val="000000">
+                <a:alpha val="35000"/>
+              </a:srgbClr>
+            </a:outerShdw>
+          </a:effectLst>
+        </p:spPr>
+      </p:sp>
+      <p:sp>
+        <p:nvSpPr>
+          <p:cNvPr id="14" name="Shape 12"/>
+          <p:cNvSpPr/>
+          <p:nvPr/>
+        </p:nvSpPr>
+        <p:spPr>
+          <a:xfrm>
+            <a:off x="749808" y="3666744"/>
+            <a:ext cx="1554480" cy="475488"/>
+          </a:xfrm>
+          <a:prstGeom prst="roundRect">
+            <a:avLst>
+              <a:gd name="adj" fmla="val 11538"/>
+            </a:avLst>
+          </a:prstGeom>
+          <a:solidFill>
+            <a:srgbClr val="1C2128"/>
+          </a:solidFill>
+          <a:ln w="12700">
+            <a:solidFill>
+              <a:srgbClr val="D29922"/>
+            </a:solidFill>
+            <a:prstDash val="solid"/>
+          </a:ln>
+        </p:spPr>
+      </p:sp>
+      <p:sp>
+        <p:nvSpPr>
+          <p:cNvPr id="15" name="Text 13"/>
+          <p:cNvSpPr/>
+          <p:nvPr/>
+        </p:nvSpPr>
+        <p:spPr>
+          <a:xfrm>
+            <a:off x="749808" y="3666744"/>
+            <a:ext cx="1554480" cy="475488"/>
+          </a:xfrm>
+          <a:prstGeom prst="rect">
+            <a:avLst/>
+          </a:prstGeom>
+          <a:noFill/>
+          <a:ln/>
+        </p:spPr>
+        <p:txBody>
+          <a:bodyPr wrap="square" rtlCol="0" anchor="ctr"/>
+          <a:lstStyle/>
+          <a:p>
+            <a:pPr algn="ctr" indent="0" marL="0">
+              <a:buNone/>
+            </a:pPr>
+            <a:r>
+              <a:rPr lang="en-US" sz="1300" b="1" dirty="0">
+                <a:solidFill>
+                  <a:srgbClr val="D29922"/>
+                </a:solidFill>
+                <a:latin typeface="Courier New" pitchFamily="34" charset="0"/>
+                <a:ea typeface="Courier New" pitchFamily="34" charset="-122"/>
+                <a:cs typeface="Courier New" pitchFamily="34" charset="-120"/>
+              </a:rPr>
+              <a:t>email_gen.py</a:t>
+            </a:r>
+            <a:endParaRPr lang="en-US" sz="1300" dirty="0"/>
+          </a:p>
+        </p:txBody>
+      </p:sp>
+      <p:sp>
+        <p:nvSpPr>
+          <p:cNvPr id="16" name="Text 14"/>
+          <p:cNvSpPr/>
+          <p:nvPr/>
+        </p:nvSpPr>
+        <p:spPr>
+          <a:xfrm>
+            <a:off x="2514600" y="3593592"/>
+            <a:ext cx="8961120" cy="640080"/>
+          </a:xfrm>
+          <a:prstGeom prst="rect">
+            <a:avLst/>
+          </a:prstGeom>
+          <a:noFill/>
+          <a:ln/>
+        </p:spPr>
+        <p:txBody>
+          <a:bodyPr wrap="square" rtlCol="0" anchor="ctr"/>
+          <a:lstStyle/>
+          <a:p>
+            <a:pPr indent="0" marL="0">
+              <a:buNone/>
+            </a:pPr>
+            <a:r>
+              <a:rPr lang="en-US" sz="1250" dirty="0">
+                <a:solidFill>
+                  <a:srgbClr val="E6EDF3"/>
+                </a:solidFill>
+                <a:latin typeface="Calibri" pitchFamily="34" charset="0"/>
+                <a:ea typeface="Calibri" pitchFamily="34" charset="-122"/>
+                <a:cs typeface="Calibri" pitchFamily="34" charset="-120"/>
+              </a:rPr>
+              <a:t>Professional vendor-friendly disclosure email; LLM-refine optional</a:t>
+            </a:r>
+            <a:endParaRPr lang="en-US" sz="1250" dirty="0"/>
+          </a:p>
+        </p:txBody>
+      </p:sp>
+      <p:sp>
+        <p:nvSpPr>
+          <p:cNvPr id="17" name="Shape 15"/>
+          <p:cNvSpPr/>
+          <p:nvPr/>
+        </p:nvSpPr>
+        <p:spPr>
+          <a:xfrm>
+            <a:off x="548640" y="4425696"/>
+            <a:ext cx="11064240" cy="841248"/>
+          </a:xfrm>
+          <a:prstGeom prst="roundRect">
+            <a:avLst>
+              <a:gd name="adj" fmla="val 9783"/>
+            </a:avLst>
+          </a:prstGeom>
+          <a:solidFill>
+            <a:srgbClr val="161B22"/>
+          </a:solidFill>
+          <a:ln w="12700">
+            <a:solidFill>
+              <a:srgbClr val="30363D"/>
+            </a:solidFill>
+            <a:prstDash val="solid"/>
+          </a:ln>
+          <a:effectLst>
+            <a:outerShdw sx="100000" sy="100000" kx="0" ky="0" algn="bl" rotWithShape="0" blurRad="101600" dist="38100" dir="5400000">
+              <a:srgbClr val="000000">
+                <a:alpha val="35000"/>
+              </a:srgbClr>
+            </a:outerShdw>
+          </a:effectLst>
+        </p:spPr>
+      </p:sp>
+      <p:sp>
+        <p:nvSpPr>
+          <p:cNvPr id="18" name="Shape 16"/>
+          <p:cNvSpPr/>
+          <p:nvPr/>
+        </p:nvSpPr>
+        <p:spPr>
+          <a:xfrm>
+            <a:off x="749808" y="4608576"/>
+            <a:ext cx="1554480" cy="475488"/>
+          </a:xfrm>
+          <a:prstGeom prst="roundRect">
+            <a:avLst>
+              <a:gd name="adj" fmla="val 11538"/>
+            </a:avLst>
+          </a:prstGeom>
+          <a:solidFill>
+            <a:srgbClr val="1C2128"/>
+          </a:solidFill>
+          <a:ln w="12700">
+            <a:solidFill>
+              <a:srgbClr val="A371F7"/>
+            </a:solidFill>
+            <a:prstDash val="solid"/>
+          </a:ln>
+        </p:spPr>
+      </p:sp>
+      <p:sp>
+        <p:nvSpPr>
+          <p:cNvPr id="19" name="Text 17"/>
+          <p:cNvSpPr/>
+          <p:nvPr/>
+        </p:nvSpPr>
+        <p:spPr>
+          <a:xfrm>
+            <a:off x="749808" y="4608576"/>
+            <a:ext cx="1554480" cy="475488"/>
+          </a:xfrm>
+          <a:prstGeom prst="rect">
+            <a:avLst/>
+          </a:prstGeom>
+          <a:noFill/>
+          <a:ln/>
+        </p:spPr>
+        <p:txBody>
+          <a:bodyPr wrap="square" rtlCol="0" anchor="ctr"/>
+          <a:lstStyle/>
+          <a:p>
+            <a:pPr algn="ctr" indent="0" marL="0">
+              <a:buNone/>
+            </a:pPr>
+            <a:r>
+              <a:rPr lang="en-US" sz="1300" b="1" dirty="0">
+                <a:solidFill>
+                  <a:srgbClr val="A371F7"/>
+                </a:solidFill>
+                <a:latin typeface="Courier New" pitchFamily="34" charset="0"/>
+                <a:ea typeface="Courier New" pitchFamily="34" charset="-122"/>
+                <a:cs typeface="Courier New" pitchFamily="34" charset="-120"/>
+              </a:rPr>
+              <a:t>report.py</a:t>
+            </a:r>
+            <a:endParaRPr lang="en-US" sz="1300" dirty="0"/>
+          </a:p>
+        </p:txBody>
+      </p:sp>
+      <p:sp>
+        <p:nvSpPr>
+          <p:cNvPr id="20" name="Text 18"/>
+          <p:cNvSpPr/>
+          <p:nvPr/>
+        </p:nvSpPr>
+        <p:spPr>
+          <a:xfrm>
+            <a:off x="2514600" y="4535424"/>
+            <a:ext cx="8961120" cy="640080"/>
+          </a:xfrm>
+          <a:prstGeom prst="rect">
+            <a:avLst/>
+          </a:prstGeom>
+          <a:noFill/>
+          <a:ln/>
+        </p:spPr>
+        <p:txBody>
+          <a:bodyPr wrap="square" rtlCol="0" anchor="ctr"/>
+          <a:lstStyle/>
+          <a:p>
+            <a:pPr indent="0" marL="0">
+              <a:buNone/>
+            </a:pPr>
+            <a:r>
+              <a:rPr lang="en-US" sz="1250" dirty="0">
+                <a:solidFill>
+                  <a:srgbClr val="E6EDF3"/>
+                </a:solidFill>
+                <a:latin typeface="Calibri" pitchFamily="34" charset="0"/>
+                <a:ea typeface="Calibri" pitchFamily="34" charset="-122"/>
+                <a:cs typeface="Calibri" pitchFamily="34" charset="-120"/>
+              </a:rPr>
+              <a:t>Disclosure report (Business Impact, Timeline, confidence) via shared generator</a:t>
+            </a:r>
+            <a:endParaRPr lang="en-US" sz="1250" dirty="0"/>
+          </a:p>
+        </p:txBody>
+      </p:sp>
+      <p:sp>
+        <p:nvSpPr>
+          <p:cNvPr id="21" name="Shape 19"/>
+          <p:cNvSpPr/>
+          <p:nvPr/>
+        </p:nvSpPr>
+        <p:spPr>
+          <a:xfrm>
+            <a:off x="548640" y="5367528"/>
+            <a:ext cx="11064240" cy="841248"/>
+          </a:xfrm>
+          <a:prstGeom prst="roundRect">
+            <a:avLst>
+              <a:gd name="adj" fmla="val 9783"/>
+            </a:avLst>
+          </a:prstGeom>
+          <a:solidFill>
+            <a:srgbClr val="161B22"/>
+          </a:solidFill>
+          <a:ln w="12700">
+            <a:solidFill>
+              <a:srgbClr val="30363D"/>
+            </a:solidFill>
+            <a:prstDash val="solid"/>
+          </a:ln>
+          <a:effectLst>
+            <a:outerShdw sx="100000" sy="100000" kx="0" ky="0" algn="bl" rotWithShape="0" blurRad="101600" dist="38100" dir="5400000">
+              <a:srgbClr val="000000">
+                <a:alpha val="35000"/>
+              </a:srgbClr>
+            </a:outerShdw>
+          </a:effectLst>
+        </p:spPr>
+      </p:sp>
+      <p:sp>
+        <p:nvSpPr>
+          <p:cNvPr id="22" name="Shape 20"/>
+          <p:cNvSpPr/>
+          <p:nvPr/>
+        </p:nvSpPr>
+        <p:spPr>
+          <a:xfrm>
+            <a:off x="749808" y="5550408"/>
+            <a:ext cx="1554480" cy="475488"/>
+          </a:xfrm>
+          <a:prstGeom prst="roundRect">
+            <a:avLst>
+              <a:gd name="adj" fmla="val 11538"/>
+            </a:avLst>
+          </a:prstGeom>
+          <a:solidFill>
+            <a:srgbClr val="1C2128"/>
+          </a:solidFill>
+          <a:ln w="12700">
+            <a:solidFill>
+              <a:srgbClr val="F85149"/>
+            </a:solidFill>
+            <a:prstDash val="solid"/>
+          </a:ln>
+        </p:spPr>
+      </p:sp>
+      <p:sp>
+        <p:nvSpPr>
+          <p:cNvPr id="23" name="Text 21"/>
+          <p:cNvSpPr/>
+          <p:nvPr/>
+        </p:nvSpPr>
+        <p:spPr>
+          <a:xfrm>
+            <a:off x="749808" y="5550408"/>
+            <a:ext cx="1554480" cy="475488"/>
+          </a:xfrm>
+          <a:prstGeom prst="rect">
+            <a:avLst/>
+          </a:prstGeom>
+          <a:noFill/>
+          <a:ln/>
+        </p:spPr>
+        <p:txBody>
+          <a:bodyPr wrap="square" rtlCol="0" anchor="ctr"/>
+          <a:lstStyle/>
+          <a:p>
+            <a:pPr algn="ctr" indent="0" marL="0">
+              <a:buNone/>
+            </a:pPr>
+            <a:r>
+              <a:rPr lang="en-US" sz="1300" b="1" dirty="0">
+                <a:solidFill>
+                  <a:srgbClr val="F85149"/>
+                </a:solidFill>
+                <a:latin typeface="Courier New" pitchFamily="34" charset="0"/>
+                <a:ea typeface="Courier New" pitchFamily="34" charset="-122"/>
+                <a:cs typeface="Courier New" pitchFamily="34" charset="-120"/>
+              </a:rPr>
+              <a:t>integration</a:t>
+            </a:r>
+            <a:endParaRPr lang="en-US" sz="1300" dirty="0"/>
+          </a:p>
+        </p:txBody>
+      </p:sp>
+      <p:sp>
+        <p:nvSpPr>
+          <p:cNvPr id="24" name="Text 22"/>
+          <p:cNvSpPr/>
+          <p:nvPr/>
+        </p:nvSpPr>
+        <p:spPr>
+          <a:xfrm>
+            <a:off x="2514600" y="5477256"/>
+            <a:ext cx="8961120" cy="640080"/>
+          </a:xfrm>
+          <a:prstGeom prst="rect">
+            <a:avLst/>
+          </a:prstGeom>
+          <a:noFill/>
+          <a:ln/>
+        </p:spPr>
+        <p:txBody>
+          <a:bodyPr wrap="square" rtlCol="0" anchor="ctr"/>
+          <a:lstStyle/>
+          <a:p>
+            <a:pPr indent="0" marL="0">
+              <a:buNone/>
+            </a:pPr>
+            <a:r>
+              <a:rPr lang="en-US" sz="1250" dirty="0">
+                <a:solidFill>
+                  <a:srgbClr val="E6EDF3"/>
+                </a:solidFill>
+                <a:latin typeface="Calibri" pitchFamily="34" charset="0"/>
+                <a:ea typeface="Calibri" pitchFamily="34" charset="-122"/>
+                <a:cs typeface="Calibri" pitchFamily="34" charset="-120"/>
+              </a:rPr>
+              <a:t>Schema v3 (findings.confidence, disclosures table); prepare-only, never sends</a:t>
+            </a:r>
+            <a:endParaRPr lang="en-US" sz="1250" dirty="0"/>
           </a:p>
         </p:txBody>
       </p:sp>
@@ -21105,7 +22795,7 @@
                 <a:ea typeface="Calibri" pitchFamily="34" charset="-122"/>
                 <a:cs typeface="Calibri" pitchFamily="34" charset="-120"/>
               </a:rPr>
-              <a:t>SecurityOps Assistant  ·  9</a:t>
+              <a:t>SecurityOps Assistant  ·  10</a:t>
             </a:r>
             <a:endParaRPr lang="en-US" sz="900" dirty="0"/>
           </a:p>
